--- a/tests/OfficeAgent.Tests/Corpus/v1.0.0/native/outputs/p-removeimage.pptx
+++ b/tests/OfficeAgent.Tests/Corpus/v1.0.0/native/outputs/p-removeimage.pptx
@@ -2,11 +2,11 @@
 <file path=ppt/presentation.xml><?xml version="1.0" encoding="utf-8"?>
 <p:presentation xmlns:r="http://schemas.openxmlformats.org/officeDocument/2006/relationships" xmlns:p="http://schemas.openxmlformats.org/presentationml/2006/main">
   <p:sldMasterIdLst>
-    <p:sldMasterId xmlns:r="http://schemas.openxmlformats.org/officeDocument/2006/relationships" id="2147483648" r:id="R82dda8003dad4ebc"/>
+    <p:sldMasterId xmlns:r="http://schemas.openxmlformats.org/officeDocument/2006/relationships" id="2147483648" r:id="R0a8c5867be414535"/>
   </p:sldMasterIdLst>
   <p:sldIdLst>
-    <p:sldId xmlns:r="http://schemas.openxmlformats.org/officeDocument/2006/relationships" id="256" r:id="R136a454b2bf6418c"/>
-    <p:sldId xmlns:r="http://schemas.openxmlformats.org/officeDocument/2006/relationships" id="257" r:id="Rb5897c0c6d8d48ce"/>
+    <p:sldId xmlns:r="http://schemas.openxmlformats.org/officeDocument/2006/relationships" id="256" r:id="Redc3c19bdbd44bd0"/>
+    <p:sldId xmlns:r="http://schemas.openxmlformats.org/officeDocument/2006/relationships" id="257" r:id="Re09f591a9e4e40cb"/>
   </p:sldIdLst>
   <p:sldSz cx="12192000" cy="6858000"/>
   <p:notesSz cx="6858000" cy="9144000"/>
@@ -80,7 +80,7 @@
   </p:cSld>
   <p:clrMap bg1="lt1" tx1="dk1" bg2="lt2" tx2="dk2" accent1="accent1" accent2="accent2" accent3="accent3" accent4="accent4" accent5="accent5" accent6="accent6" hlink="hlink" folHlink="folHlink"/>
   <p:sldLayoutIdLst>
-    <p:sldLayoutId xmlns:r="http://schemas.openxmlformats.org/officeDocument/2006/relationships" id="2147483649" r:id="R8116027d2a1249ab"/>
+    <p:sldLayoutId xmlns:r="http://schemas.openxmlformats.org/officeDocument/2006/relationships" id="2147483649" r:id="R10d4a3bdf80b4556"/>
   </p:sldLayoutIdLst>
 </p:sldMaster>
 </file>

--- a/tests/OfficeAgent.Tests/Corpus/v1.0.0/native/outputs/p-removeimage.pptx
+++ b/tests/OfficeAgent.Tests/Corpus/v1.0.0/native/outputs/p-removeimage.pptx
@@ -2,11 +2,11 @@
 <file path=ppt/presentation.xml><?xml version="1.0" encoding="utf-8"?>
 <p:presentation xmlns:r="http://schemas.openxmlformats.org/officeDocument/2006/relationships" xmlns:p="http://schemas.openxmlformats.org/presentationml/2006/main">
   <p:sldMasterIdLst>
-    <p:sldMasterId xmlns:r="http://schemas.openxmlformats.org/officeDocument/2006/relationships" id="2147483648" r:id="R0a8c5867be414535"/>
+    <p:sldMasterId xmlns:r="http://schemas.openxmlformats.org/officeDocument/2006/relationships" id="2147483648" r:id="Rc61e8050960d43a3"/>
   </p:sldMasterIdLst>
   <p:sldIdLst>
-    <p:sldId xmlns:r="http://schemas.openxmlformats.org/officeDocument/2006/relationships" id="256" r:id="Redc3c19bdbd44bd0"/>
-    <p:sldId xmlns:r="http://schemas.openxmlformats.org/officeDocument/2006/relationships" id="257" r:id="Re09f591a9e4e40cb"/>
+    <p:sldId xmlns:r="http://schemas.openxmlformats.org/officeDocument/2006/relationships" id="256" r:id="R38fe1680ffa34d21"/>
+    <p:sldId xmlns:r="http://schemas.openxmlformats.org/officeDocument/2006/relationships" id="257" r:id="Rdb85e52a643449eb"/>
   </p:sldIdLst>
   <p:sldSz cx="12192000" cy="6858000"/>
   <p:notesSz cx="6858000" cy="9144000"/>
@@ -80,7 +80,7 @@
   </p:cSld>
   <p:clrMap bg1="lt1" tx1="dk1" bg2="lt2" tx2="dk2" accent1="accent1" accent2="accent2" accent3="accent3" accent4="accent4" accent5="accent5" accent6="accent6" hlink="hlink" folHlink="folHlink"/>
   <p:sldLayoutIdLst>
-    <p:sldLayoutId xmlns:r="http://schemas.openxmlformats.org/officeDocument/2006/relationships" id="2147483649" r:id="R10d4a3bdf80b4556"/>
+    <p:sldLayoutId xmlns:r="http://schemas.openxmlformats.org/officeDocument/2006/relationships" id="2147483649" r:id="Rfc8ca5f3f58e4370"/>
   </p:sldLayoutIdLst>
 </p:sldMaster>
 </file>

--- a/tests/OfficeAgent.Tests/Corpus/v1.0.0/native/outputs/p-removeimage.pptx
+++ b/tests/OfficeAgent.Tests/Corpus/v1.0.0/native/outputs/p-removeimage.pptx
@@ -2,11 +2,11 @@
 <file path=ppt/presentation.xml><?xml version="1.0" encoding="utf-8"?>
 <p:presentation xmlns:r="http://schemas.openxmlformats.org/officeDocument/2006/relationships" xmlns:p="http://schemas.openxmlformats.org/presentationml/2006/main">
   <p:sldMasterIdLst>
-    <p:sldMasterId xmlns:r="http://schemas.openxmlformats.org/officeDocument/2006/relationships" id="2147483648" r:id="Rc61e8050960d43a3"/>
+    <p:sldMasterId xmlns:r="http://schemas.openxmlformats.org/officeDocument/2006/relationships" id="2147483648" r:id="R89ea42d7792f4fce"/>
   </p:sldMasterIdLst>
   <p:sldIdLst>
-    <p:sldId xmlns:r="http://schemas.openxmlformats.org/officeDocument/2006/relationships" id="256" r:id="R38fe1680ffa34d21"/>
-    <p:sldId xmlns:r="http://schemas.openxmlformats.org/officeDocument/2006/relationships" id="257" r:id="Rdb85e52a643449eb"/>
+    <p:sldId xmlns:r="http://schemas.openxmlformats.org/officeDocument/2006/relationships" id="256" r:id="Re8f8b33240c44f82"/>
+    <p:sldId xmlns:r="http://schemas.openxmlformats.org/officeDocument/2006/relationships" id="257" r:id="Rd845e2983dac4c97"/>
   </p:sldIdLst>
   <p:sldSz cx="12192000" cy="6858000"/>
   <p:notesSz cx="6858000" cy="9144000"/>
@@ -80,7 +80,7 @@
   </p:cSld>
   <p:clrMap bg1="lt1" tx1="dk1" bg2="lt2" tx2="dk2" accent1="accent1" accent2="accent2" accent3="accent3" accent4="accent4" accent5="accent5" accent6="accent6" hlink="hlink" folHlink="folHlink"/>
   <p:sldLayoutIdLst>
-    <p:sldLayoutId xmlns:r="http://schemas.openxmlformats.org/officeDocument/2006/relationships" id="2147483649" r:id="Rfc8ca5f3f58e4370"/>
+    <p:sldLayoutId xmlns:r="http://schemas.openxmlformats.org/officeDocument/2006/relationships" id="2147483649" r:id="R96b2a673ac9a49f7"/>
   </p:sldLayoutIdLst>
 </p:sldMaster>
 </file>

--- a/tests/OfficeAgent.Tests/Corpus/v1.0.0/native/outputs/p-removeimage.pptx
+++ b/tests/OfficeAgent.Tests/Corpus/v1.0.0/native/outputs/p-removeimage.pptx
@@ -2,11 +2,11 @@
 <file path=ppt/presentation.xml><?xml version="1.0" encoding="utf-8"?>
 <p:presentation xmlns:r="http://schemas.openxmlformats.org/officeDocument/2006/relationships" xmlns:p="http://schemas.openxmlformats.org/presentationml/2006/main">
   <p:sldMasterIdLst>
-    <p:sldMasterId xmlns:r="http://schemas.openxmlformats.org/officeDocument/2006/relationships" id="2147483648" r:id="R89ea42d7792f4fce"/>
+    <p:sldMasterId xmlns:r="http://schemas.openxmlformats.org/officeDocument/2006/relationships" id="2147483648" r:id="R948e00f483bb433e"/>
   </p:sldMasterIdLst>
   <p:sldIdLst>
-    <p:sldId xmlns:r="http://schemas.openxmlformats.org/officeDocument/2006/relationships" id="256" r:id="Re8f8b33240c44f82"/>
-    <p:sldId xmlns:r="http://schemas.openxmlformats.org/officeDocument/2006/relationships" id="257" r:id="Rd845e2983dac4c97"/>
+    <p:sldId xmlns:r="http://schemas.openxmlformats.org/officeDocument/2006/relationships" id="256" r:id="R87d02d1b8a45462b"/>
+    <p:sldId xmlns:r="http://schemas.openxmlformats.org/officeDocument/2006/relationships" id="257" r:id="Ra7f229672bfa47fe"/>
   </p:sldIdLst>
   <p:sldSz cx="12192000" cy="6858000"/>
   <p:notesSz cx="6858000" cy="9144000"/>
@@ -80,7 +80,7 @@
   </p:cSld>
   <p:clrMap bg1="lt1" tx1="dk1" bg2="lt2" tx2="dk2" accent1="accent1" accent2="accent2" accent3="accent3" accent4="accent4" accent5="accent5" accent6="accent6" hlink="hlink" folHlink="folHlink"/>
   <p:sldLayoutIdLst>
-    <p:sldLayoutId xmlns:r="http://schemas.openxmlformats.org/officeDocument/2006/relationships" id="2147483649" r:id="R96b2a673ac9a49f7"/>
+    <p:sldLayoutId xmlns:r="http://schemas.openxmlformats.org/officeDocument/2006/relationships" id="2147483649" r:id="Re4a9c208ec184fd4"/>
   </p:sldLayoutIdLst>
 </p:sldMaster>
 </file>

--- a/tests/OfficeAgent.Tests/Corpus/v1.0.0/native/outputs/p-removeimage.pptx
+++ b/tests/OfficeAgent.Tests/Corpus/v1.0.0/native/outputs/p-removeimage.pptx
@@ -2,11 +2,11 @@
 <file path=ppt/presentation.xml><?xml version="1.0" encoding="utf-8"?>
 <p:presentation xmlns:r="http://schemas.openxmlformats.org/officeDocument/2006/relationships" xmlns:p="http://schemas.openxmlformats.org/presentationml/2006/main">
   <p:sldMasterIdLst>
-    <p:sldMasterId xmlns:r="http://schemas.openxmlformats.org/officeDocument/2006/relationships" id="2147483648" r:id="R948e00f483bb433e"/>
+    <p:sldMasterId xmlns:r="http://schemas.openxmlformats.org/officeDocument/2006/relationships" id="2147483648" r:id="R77e8bad93ab34fb4"/>
   </p:sldMasterIdLst>
   <p:sldIdLst>
-    <p:sldId xmlns:r="http://schemas.openxmlformats.org/officeDocument/2006/relationships" id="256" r:id="R87d02d1b8a45462b"/>
-    <p:sldId xmlns:r="http://schemas.openxmlformats.org/officeDocument/2006/relationships" id="257" r:id="Ra7f229672bfa47fe"/>
+    <p:sldId xmlns:r="http://schemas.openxmlformats.org/officeDocument/2006/relationships" id="256" r:id="R5980bd5c968a4229"/>
+    <p:sldId xmlns:r="http://schemas.openxmlformats.org/officeDocument/2006/relationships" id="257" r:id="R1a759961f97e4695"/>
   </p:sldIdLst>
   <p:sldSz cx="12192000" cy="6858000"/>
   <p:notesSz cx="6858000" cy="9144000"/>
@@ -49,7 +49,7 @@
 </file>
 
 <file path=ppt/slideLayouts/slideLayout1.xml><?xml version="1.0" encoding="utf-8"?>
-<p:sldLayout xmlns:p="http://schemas.openxmlformats.org/presentationml/2006/main" type="title">
+<p:sldLayout xmlns:a="http://schemas.openxmlformats.org/drawingml/2006/main" xmlns:p="http://schemas.openxmlformats.org/presentationml/2006/main" type="title">
   <p:cSld>
     <p:spTree>
       <p:nvGrpSpPr>
@@ -67,7 +67,7 @@
 </file>
 
 <file path=ppt/slideMasters/slideMaster1.xml><?xml version="1.0" encoding="utf-8"?>
-<p:sldMaster xmlns:p="http://schemas.openxmlformats.org/presentationml/2006/main">
+<p:sldMaster xmlns:r="http://schemas.openxmlformats.org/officeDocument/2006/relationships" xmlns:p="http://schemas.openxmlformats.org/presentationml/2006/main">
   <p:cSld>
     <p:spTree>
       <p:nvGrpSpPr>
@@ -80,7 +80,7 @@
   </p:cSld>
   <p:clrMap bg1="lt1" tx1="dk1" bg2="lt2" tx2="dk2" accent1="accent1" accent2="accent2" accent3="accent3" accent4="accent4" accent5="accent5" accent6="accent6" hlink="hlink" folHlink="folHlink"/>
   <p:sldLayoutIdLst>
-    <p:sldLayoutId xmlns:r="http://schemas.openxmlformats.org/officeDocument/2006/relationships" id="2147483649" r:id="Re4a9c208ec184fd4"/>
+    <p:sldLayoutId xmlns:r="http://schemas.openxmlformats.org/officeDocument/2006/relationships" id="2147483649" r:id="R5808e1b6be4345d1"/>
   </p:sldLayoutIdLst>
 </p:sldMaster>
 </file>
